--- a/1_Презентація.pptx
+++ b/1_Презентація.pptx
@@ -3166,7 +3166,7 @@
           <a:p>
             <a:r>
               <a:rPr lang="en-US" dirty="0"/>
-              <a:t>Документ створено для самостійного читання. Числа на слайдах експортує ноутбук у output/deck_data.json, тому деку й аналіз неможливо розсинхронізувати.</a:t>
+              <a:t>Документ створено для самостійного читання. Числа на слайдах експортує ноутбук у data/deck_data.json, тому деку й аналіз неможливо розсинхронізувати.</a:t>
             </a:r>
             <a:endParaRPr lang="en-US" dirty="0"/>
           </a:p>
@@ -24221,7 +24221,7 @@
                 <a:ea typeface="Calibri" pitchFamily="34" charset="-122"/>
                 <a:cs typeface="Calibri" pitchFamily="34" charset="-120"/>
               </a:rPr>
-              <a:t>output/deck_data.json</a:t>
+              <a:t>data/deck_data.json</a:t>
             </a:r>
             <a:endParaRPr lang="en-US" sz="1200" dirty="0"/>
           </a:p>
@@ -24674,7 +24674,7 @@
                 <a:ea typeface="Calibri" pitchFamily="34" charset="-122"/>
                 <a:cs typeface="Calibri" pitchFamily="34" charset="-120"/>
               </a:rPr>
-              <a:t>Встановити бібліотеки з requirements.txt і виконати всі комірки ноутбука від початку до кінця з цієї теки як кореня проєкту. Графіки збережуться в output/figures, числа — в output/deck_data.json.</a:t>
+              <a:t>Встановити бібліотеки з requirements.txt і виконати всі комірки ноутбука від початку до кінця з цієї теки як кореня проєкту. Графіки збережуться в figures, числа — в data/deck_data.json.</a:t>
             </a:r>
             <a:endParaRPr lang="en-US" sz="1150" dirty="0"/>
           </a:p>

--- a/1_Презентація.pptx
+++ b/1_Презентація.pptx
@@ -5443,7 +5443,7 @@
       </p:sp>
       <p:pic>
         <p:nvPicPr>
-          <p:cNvPr id="4" name="Image 0" descr="C:\Users\Miller\Desktop\case # 4 genesis\submission_v2\build\assets\logo_brand.png">    </p:cNvPr>
+          <p:cNvPr id="4" name="Image 0" descr="OBRIO">    </p:cNvPr>
           <p:cNvPicPr>
             <a:picLocks noChangeAspect="1"/>
           </p:cNvPicPr>
@@ -8441,7 +8441,7 @@
       </p:sp>
       <p:pic>
         <p:nvPicPr>
-          <p:cNvPr id="16" name="Image 0" descr="C:\Users\Miller\Desktop\case # 4 genesis\submission_v2\build\assets\logo_ink.png">    </p:cNvPr>
+          <p:cNvPr id="16" name="Image 0" descr="OBRIO">    </p:cNvPr>
           <p:cNvPicPr>
             <a:picLocks noChangeAspect="1"/>
           </p:cNvPicPr>
@@ -9212,7 +9212,7 @@
       </p:sp>
       <p:pic>
         <p:nvPicPr>
-          <p:cNvPr id="21" name="Image 0" descr="C:\Users\Miller\Desktop\case # 4 genesis\submission_v2\build\assets\logo_ink.png">    </p:cNvPr>
+          <p:cNvPr id="21" name="Image 0" descr="OBRIO">    </p:cNvPr>
           <p:cNvPicPr>
             <a:picLocks noChangeAspect="1"/>
           </p:cNvPicPr>
@@ -10385,7 +10385,7 @@
       </p:sp>
       <p:pic>
         <p:nvPicPr>
-          <p:cNvPr id="28" name="Image 0" descr="C:\Users\Miller\Desktop\case # 4 genesis\submission_v2\build\assets\logo_ink.png">    </p:cNvPr>
+          <p:cNvPr id="28" name="Image 0" descr="OBRIO">    </p:cNvPr>
           <p:cNvPicPr>
             <a:picLocks noChangeAspect="1"/>
           </p:cNvPicPr>
@@ -11518,7 +11518,7 @@
       </p:sp>
       <p:pic>
         <p:nvPicPr>
-          <p:cNvPr id="29" name="Image 0" descr="C:\Users\Miller\Desktop\case # 4 genesis\submission_v2\build\assets\logo_ink.png">    </p:cNvPr>
+          <p:cNvPr id="29" name="Image 0" descr="OBRIO">    </p:cNvPr>
           <p:cNvPicPr>
             <a:picLocks noChangeAspect="1"/>
           </p:cNvPicPr>
@@ -11879,9 +11879,10 @@
             <a:tbl>
               <a:tblPr/>
               <a:tblGrid>
-                <a:gridCol w="1463040"/>
-                <a:gridCol w="1005840"/>
-                <a:gridCol w="1536192"/>
+                <a:gridCol w="1060704"/>
+                <a:gridCol w="749808"/>
+                <a:gridCol w="896112"/>
+                <a:gridCol w="1298448"/>
               </a:tblGrid>
               <a:tr h="320040">
                 <a:tc>
@@ -11970,6 +11971,95 @@
                           <a:cs typeface="Calibri" pitchFamily="34" charset="-120"/>
                         </a:rPr>
                         <a:t>кандидатів</a:t>
+                      </a:r>
+                      <a:endParaRPr lang="en-US" sz="1000" dirty="0">
+                        <a:latin typeface="Calibri" charset="0"/>
+                        <a:ea typeface="Calibri" charset="0"/>
+                        <a:cs typeface="Calibri" charset="0"/>
+                      </a:endParaRPr>
+                    </a:p>
+                  </a:txBody>
+                  <a:tcPr marL="91440" marR="91440" marT="45720" marB="45720" anchor="ctr">
+                    <a:lnL w="6350" cap="flat" cmpd="sng" algn="ctr">
+                      <a:solidFill>
+                        <a:srgbClr val="E3E1F2"/>
+                      </a:solidFill>
+                      <a:prstDash val="solid"/>
+                      <a:round/>
+                      <a:headEnd type="none" w="med" len="med"/>
+                      <a:tailEnd type="none" w="med" len="med"/>
+                    </a:lnL>
+                    <a:lnR w="6350" cap="flat" cmpd="sng" algn="ctr">
+                      <a:solidFill>
+                        <a:srgbClr val="E3E1F2"/>
+                      </a:solidFill>
+                      <a:prstDash val="solid"/>
+                      <a:round/>
+                      <a:headEnd type="none" w="med" len="med"/>
+                      <a:tailEnd type="none" w="med" len="med"/>
+                    </a:lnR>
+                    <a:lnT w="6350" cap="flat" cmpd="sng" algn="ctr">
+                      <a:solidFill>
+                        <a:srgbClr val="E3E1F2"/>
+                      </a:solidFill>
+                      <a:prstDash val="solid"/>
+                      <a:round/>
+                      <a:headEnd type="none" w="med" len="med"/>
+                      <a:tailEnd type="none" w="med" len="med"/>
+                    </a:lnT>
+                    <a:lnB w="6350" cap="flat" cmpd="sng" algn="ctr">
+                      <a:solidFill>
+                        <a:srgbClr val="E3E1F2"/>
+                      </a:solidFill>
+                      <a:prstDash val="solid"/>
+                      <a:round/>
+                      <a:headEnd type="none" w="med" len="med"/>
+                      <a:tailEnd type="none" w="med" len="med"/>
+                    </a:lnB>
+                    <a:solidFill>
+                      <a:srgbClr val="FFFFFF"/>
+                    </a:solidFill>
+                  </a:tcPr>
+                </a:tc>
+                <a:tc>
+                  <a:txBody>
+                    <a:bodyPr/>
+                    <a:lstStyle/>
+                    <a:p>
+                      <a:pPr algn="r" indent="0" marL="0">
+                        <a:buNone/>
+                      </a:pPr>
+                      <a:r>
+                        <a:rPr lang="en-US" sz="1000" b="1" dirty="0">
+                          <a:solidFill>
+                            <a:srgbClr val="1F1D3D"/>
+                          </a:solidFill>
+                          <a:latin typeface="Calibri" pitchFamily="34" charset="0"/>
+                          <a:ea typeface="Calibri" pitchFamily="34" charset="-122"/>
+                          <a:cs typeface="Calibri" pitchFamily="34" charset="-120"/>
+                        </a:rPr>
+                        <a:t>потребують</a:t>
+                      </a:r>
+                      <a:endParaRPr lang="en-US" sz="1000" dirty="0">
+                        <a:latin typeface="Calibri" charset="0"/>
+                        <a:ea typeface="Calibri" charset="0"/>
+                        <a:cs typeface="Calibri" charset="0"/>
+                      </a:endParaRPr>
+                    </a:p>
+                    <a:p>
+                      <a:pPr algn="r" indent="0" marL="0">
+                        <a:buNone/>
+                      </a:pPr>
+                      <a:r>
+                        <a:rPr lang="en-US" sz="1000" b="1" dirty="0">
+                          <a:solidFill>
+                            <a:srgbClr val="1F1D3D"/>
+                          </a:solidFill>
+                          <a:latin typeface="Calibri" pitchFamily="34" charset="0"/>
+                          <a:ea typeface="Calibri" pitchFamily="34" charset="-122"/>
+                          <a:cs typeface="Calibri" pitchFamily="34" charset="-120"/>
+                        </a:rPr>
+                        <a:t>бюджету</a:t>
                       </a:r>
                       <a:endParaRPr lang="en-US" sz="1000" dirty="0">
                         <a:latin typeface="Calibri" charset="0"/>
@@ -12264,6 +12354,74 @@
                           <a:ea typeface="Calibri" pitchFamily="34" charset="-122"/>
                           <a:cs typeface="Calibri" pitchFamily="34" charset="-120"/>
                         </a:rPr>
+                        <a:t>794</a:t>
+                      </a:r>
+                      <a:endParaRPr lang="en-US" sz="1000" dirty="0">
+                        <a:latin typeface="Calibri" charset="0"/>
+                        <a:ea typeface="Calibri" charset="0"/>
+                        <a:cs typeface="Calibri" charset="0"/>
+                      </a:endParaRPr>
+                    </a:p>
+                  </a:txBody>
+                  <a:tcPr marL="91440" marR="91440" marT="45720" marB="45720" anchor="ctr">
+                    <a:lnL w="6350" cap="flat" cmpd="sng" algn="ctr">
+                      <a:solidFill>
+                        <a:srgbClr val="E3E1F2"/>
+                      </a:solidFill>
+                      <a:prstDash val="solid"/>
+                      <a:round/>
+                      <a:headEnd type="none" w="med" len="med"/>
+                      <a:tailEnd type="none" w="med" len="med"/>
+                    </a:lnL>
+                    <a:lnR w="6350" cap="flat" cmpd="sng" algn="ctr">
+                      <a:solidFill>
+                        <a:srgbClr val="E3E1F2"/>
+                      </a:solidFill>
+                      <a:prstDash val="solid"/>
+                      <a:round/>
+                      <a:headEnd type="none" w="med" len="med"/>
+                      <a:tailEnd type="none" w="med" len="med"/>
+                    </a:lnR>
+                    <a:lnT w="6350" cap="flat" cmpd="sng" algn="ctr">
+                      <a:solidFill>
+                        <a:srgbClr val="E3E1F2"/>
+                      </a:solidFill>
+                      <a:prstDash val="solid"/>
+                      <a:round/>
+                      <a:headEnd type="none" w="med" len="med"/>
+                      <a:tailEnd type="none" w="med" len="med"/>
+                    </a:lnT>
+                    <a:lnB w="6350" cap="flat" cmpd="sng" algn="ctr">
+                      <a:solidFill>
+                        <a:srgbClr val="E3E1F2"/>
+                      </a:solidFill>
+                      <a:prstDash val="solid"/>
+                      <a:round/>
+                      <a:headEnd type="none" w="med" len="med"/>
+                      <a:tailEnd type="none" w="med" len="med"/>
+                    </a:lnB>
+                    <a:solidFill>
+                      <a:srgbClr val="FFFFFF"/>
+                    </a:solidFill>
+                  </a:tcPr>
+                </a:tc>
+                <a:tc>
+                  <a:txBody>
+                    <a:bodyPr/>
+                    <a:lstStyle/>
+                    <a:p>
+                      <a:pPr algn="r" indent="0" marL="0">
+                        <a:buNone/>
+                      </a:pPr>
+                      <a:r>
+                        <a:rPr lang="en-US" sz="1000" dirty="0">
+                          <a:solidFill>
+                            <a:srgbClr val="1F1D3D"/>
+                          </a:solidFill>
+                          <a:latin typeface="Calibri" pitchFamily="34" charset="0"/>
+                          <a:ea typeface="Calibri" pitchFamily="34" charset="-122"/>
+                          <a:cs typeface="Calibri" pitchFamily="34" charset="-120"/>
+                        </a:rPr>
                         <a:t>171 (22%)</a:t>
                       </a:r>
                       <a:endParaRPr lang="en-US" sz="1000" dirty="0">
@@ -12470,6 +12628,74 @@
                           <a:ea typeface="Calibri" pitchFamily="34" charset="-122"/>
                           <a:cs typeface="Calibri" pitchFamily="34" charset="-120"/>
                         </a:rPr>
+                        <a:t>1 910</a:t>
+                      </a:r>
+                      <a:endParaRPr lang="en-US" sz="1000" dirty="0">
+                        <a:latin typeface="Calibri" charset="0"/>
+                        <a:ea typeface="Calibri" charset="0"/>
+                        <a:cs typeface="Calibri" charset="0"/>
+                      </a:endParaRPr>
+                    </a:p>
+                  </a:txBody>
+                  <a:tcPr marL="91440" marR="91440" marT="45720" marB="45720" anchor="ctr">
+                    <a:lnL w="6350" cap="flat" cmpd="sng" algn="ctr">
+                      <a:solidFill>
+                        <a:srgbClr val="E3E1F2"/>
+                      </a:solidFill>
+                      <a:prstDash val="solid"/>
+                      <a:round/>
+                      <a:headEnd type="none" w="med" len="med"/>
+                      <a:tailEnd type="none" w="med" len="med"/>
+                    </a:lnL>
+                    <a:lnR w="6350" cap="flat" cmpd="sng" algn="ctr">
+                      <a:solidFill>
+                        <a:srgbClr val="E3E1F2"/>
+                      </a:solidFill>
+                      <a:prstDash val="solid"/>
+                      <a:round/>
+                      <a:headEnd type="none" w="med" len="med"/>
+                      <a:tailEnd type="none" w="med" len="med"/>
+                    </a:lnR>
+                    <a:lnT w="6350" cap="flat" cmpd="sng" algn="ctr">
+                      <a:solidFill>
+                        <a:srgbClr val="E3E1F2"/>
+                      </a:solidFill>
+                      <a:prstDash val="solid"/>
+                      <a:round/>
+                      <a:headEnd type="none" w="med" len="med"/>
+                      <a:tailEnd type="none" w="med" len="med"/>
+                    </a:lnT>
+                    <a:lnB w="6350" cap="flat" cmpd="sng" algn="ctr">
+                      <a:solidFill>
+                        <a:srgbClr val="E3E1F2"/>
+                      </a:solidFill>
+                      <a:prstDash val="solid"/>
+                      <a:round/>
+                      <a:headEnd type="none" w="med" len="med"/>
+                      <a:tailEnd type="none" w="med" len="med"/>
+                    </a:lnB>
+                    <a:solidFill>
+                      <a:srgbClr val="FFFFFF"/>
+                    </a:solidFill>
+                  </a:tcPr>
+                </a:tc>
+                <a:tc>
+                  <a:txBody>
+                    <a:bodyPr/>
+                    <a:lstStyle/>
+                    <a:p>
+                      <a:pPr algn="r" indent="0" marL="0">
+                        <a:buNone/>
+                      </a:pPr>
+                      <a:r>
+                        <a:rPr lang="en-US" sz="1000" dirty="0">
+                          <a:solidFill>
+                            <a:srgbClr val="1F1D3D"/>
+                          </a:solidFill>
+                          <a:latin typeface="Calibri" pitchFamily="34" charset="0"/>
+                          <a:ea typeface="Calibri" pitchFamily="34" charset="-122"/>
+                          <a:cs typeface="Calibri" pitchFamily="34" charset="-120"/>
+                        </a:rPr>
                         <a:t>501 (26%)</a:t>
                       </a:r>
                       <a:endParaRPr lang="en-US" sz="1000" dirty="0">
@@ -12676,6 +12902,74 @@
                           <a:ea typeface="Calibri" pitchFamily="34" charset="-122"/>
                           <a:cs typeface="Calibri" pitchFamily="34" charset="-120"/>
                         </a:rPr>
+                        <a:t>38</a:t>
+                      </a:r>
+                      <a:endParaRPr lang="en-US" sz="1000" dirty="0">
+                        <a:latin typeface="Calibri" charset="0"/>
+                        <a:ea typeface="Calibri" charset="0"/>
+                        <a:cs typeface="Calibri" charset="0"/>
+                      </a:endParaRPr>
+                    </a:p>
+                  </a:txBody>
+                  <a:tcPr marL="91440" marR="91440" marT="45720" marB="45720" anchor="ctr">
+                    <a:lnL w="6350" cap="flat" cmpd="sng" algn="ctr">
+                      <a:solidFill>
+                        <a:srgbClr val="E3E1F2"/>
+                      </a:solidFill>
+                      <a:prstDash val="solid"/>
+                      <a:round/>
+                      <a:headEnd type="none" w="med" len="med"/>
+                      <a:tailEnd type="none" w="med" len="med"/>
+                    </a:lnL>
+                    <a:lnR w="6350" cap="flat" cmpd="sng" algn="ctr">
+                      <a:solidFill>
+                        <a:srgbClr val="E3E1F2"/>
+                      </a:solidFill>
+                      <a:prstDash val="solid"/>
+                      <a:round/>
+                      <a:headEnd type="none" w="med" len="med"/>
+                      <a:tailEnd type="none" w="med" len="med"/>
+                    </a:lnR>
+                    <a:lnT w="6350" cap="flat" cmpd="sng" algn="ctr">
+                      <a:solidFill>
+                        <a:srgbClr val="E3E1F2"/>
+                      </a:solidFill>
+                      <a:prstDash val="solid"/>
+                      <a:round/>
+                      <a:headEnd type="none" w="med" len="med"/>
+                      <a:tailEnd type="none" w="med" len="med"/>
+                    </a:lnT>
+                    <a:lnB w="6350" cap="flat" cmpd="sng" algn="ctr">
+                      <a:solidFill>
+                        <a:srgbClr val="E3E1F2"/>
+                      </a:solidFill>
+                      <a:prstDash val="solid"/>
+                      <a:round/>
+                      <a:headEnd type="none" w="med" len="med"/>
+                      <a:tailEnd type="none" w="med" len="med"/>
+                    </a:lnB>
+                    <a:solidFill>
+                      <a:srgbClr val="FFFFFF"/>
+                    </a:solidFill>
+                  </a:tcPr>
+                </a:tc>
+                <a:tc>
+                  <a:txBody>
+                    <a:bodyPr/>
+                    <a:lstStyle/>
+                    <a:p>
+                      <a:pPr algn="r" indent="0" marL="0">
+                        <a:buNone/>
+                      </a:pPr>
+                      <a:r>
+                        <a:rPr lang="en-US" sz="1000" dirty="0">
+                          <a:solidFill>
+                            <a:srgbClr val="1F1D3D"/>
+                          </a:solidFill>
+                          <a:latin typeface="Calibri" pitchFamily="34" charset="0"/>
+                          <a:ea typeface="Calibri" pitchFamily="34" charset="-122"/>
+                          <a:cs typeface="Calibri" pitchFamily="34" charset="-120"/>
+                        </a:rPr>
                         <a:t>20 (53%)</a:t>
                       </a:r>
                       <a:endParaRPr lang="en-US" sz="1000" dirty="0">
@@ -12882,6 +13176,74 @@
                           <a:ea typeface="Calibri" pitchFamily="34" charset="-122"/>
                           <a:cs typeface="Calibri" pitchFamily="34" charset="-120"/>
                         </a:rPr>
+                        <a:t>408</a:t>
+                      </a:r>
+                      <a:endParaRPr lang="en-US" sz="1000" dirty="0">
+                        <a:latin typeface="Calibri" charset="0"/>
+                        <a:ea typeface="Calibri" charset="0"/>
+                        <a:cs typeface="Calibri" charset="0"/>
+                      </a:endParaRPr>
+                    </a:p>
+                  </a:txBody>
+                  <a:tcPr marL="91440" marR="91440" marT="45720" marB="45720" anchor="ctr">
+                    <a:lnL w="6350" cap="flat" cmpd="sng" algn="ctr">
+                      <a:solidFill>
+                        <a:srgbClr val="E3E1F2"/>
+                      </a:solidFill>
+                      <a:prstDash val="solid"/>
+                      <a:round/>
+                      <a:headEnd type="none" w="med" len="med"/>
+                      <a:tailEnd type="none" w="med" len="med"/>
+                    </a:lnL>
+                    <a:lnR w="6350" cap="flat" cmpd="sng" algn="ctr">
+                      <a:solidFill>
+                        <a:srgbClr val="E3E1F2"/>
+                      </a:solidFill>
+                      <a:prstDash val="solid"/>
+                      <a:round/>
+                      <a:headEnd type="none" w="med" len="med"/>
+                      <a:tailEnd type="none" w="med" len="med"/>
+                    </a:lnR>
+                    <a:lnT w="6350" cap="flat" cmpd="sng" algn="ctr">
+                      <a:solidFill>
+                        <a:srgbClr val="E3E1F2"/>
+                      </a:solidFill>
+                      <a:prstDash val="solid"/>
+                      <a:round/>
+                      <a:headEnd type="none" w="med" len="med"/>
+                      <a:tailEnd type="none" w="med" len="med"/>
+                    </a:lnT>
+                    <a:lnB w="6350" cap="flat" cmpd="sng" algn="ctr">
+                      <a:solidFill>
+                        <a:srgbClr val="E3E1F2"/>
+                      </a:solidFill>
+                      <a:prstDash val="solid"/>
+                      <a:round/>
+                      <a:headEnd type="none" w="med" len="med"/>
+                      <a:tailEnd type="none" w="med" len="med"/>
+                    </a:lnB>
+                    <a:solidFill>
+                      <a:srgbClr val="FFFFFF"/>
+                    </a:solidFill>
+                  </a:tcPr>
+                </a:tc>
+                <a:tc>
+                  <a:txBody>
+                    <a:bodyPr/>
+                    <a:lstStyle/>
+                    <a:p>
+                      <a:pPr algn="r" indent="0" marL="0">
+                        <a:buNone/>
+                      </a:pPr>
+                      <a:r>
+                        <a:rPr lang="en-US" sz="1000" dirty="0">
+                          <a:solidFill>
+                            <a:srgbClr val="1F1D3D"/>
+                          </a:solidFill>
+                          <a:latin typeface="Calibri" pitchFamily="34" charset="0"/>
+                          <a:ea typeface="Calibri" pitchFamily="34" charset="-122"/>
+                          <a:cs typeface="Calibri" pitchFamily="34" charset="-120"/>
+                        </a:rPr>
                         <a:t>190 (47%)</a:t>
                       </a:r>
                       <a:endParaRPr lang="en-US" sz="1000" dirty="0">
@@ -13088,6 +13450,74 @@
                           <a:ea typeface="Calibri" pitchFamily="34" charset="-122"/>
                           <a:cs typeface="Calibri" pitchFamily="34" charset="-120"/>
                         </a:rPr>
+                        <a:t>180</a:t>
+                      </a:r>
+                      <a:endParaRPr lang="en-US" sz="1000" dirty="0">
+                        <a:latin typeface="Calibri" charset="0"/>
+                        <a:ea typeface="Calibri" charset="0"/>
+                        <a:cs typeface="Calibri" charset="0"/>
+                      </a:endParaRPr>
+                    </a:p>
+                  </a:txBody>
+                  <a:tcPr marL="91440" marR="91440" marT="45720" marB="45720" anchor="ctr">
+                    <a:lnL w="6350" cap="flat" cmpd="sng" algn="ctr">
+                      <a:solidFill>
+                        <a:srgbClr val="E3E1F2"/>
+                      </a:solidFill>
+                      <a:prstDash val="solid"/>
+                      <a:round/>
+                      <a:headEnd type="none" w="med" len="med"/>
+                      <a:tailEnd type="none" w="med" len="med"/>
+                    </a:lnL>
+                    <a:lnR w="6350" cap="flat" cmpd="sng" algn="ctr">
+                      <a:solidFill>
+                        <a:srgbClr val="E3E1F2"/>
+                      </a:solidFill>
+                      <a:prstDash val="solid"/>
+                      <a:round/>
+                      <a:headEnd type="none" w="med" len="med"/>
+                      <a:tailEnd type="none" w="med" len="med"/>
+                    </a:lnR>
+                    <a:lnT w="6350" cap="flat" cmpd="sng" algn="ctr">
+                      <a:solidFill>
+                        <a:srgbClr val="E3E1F2"/>
+                      </a:solidFill>
+                      <a:prstDash val="solid"/>
+                      <a:round/>
+                      <a:headEnd type="none" w="med" len="med"/>
+                      <a:tailEnd type="none" w="med" len="med"/>
+                    </a:lnT>
+                    <a:lnB w="6350" cap="flat" cmpd="sng" algn="ctr">
+                      <a:solidFill>
+                        <a:srgbClr val="E3E1F2"/>
+                      </a:solidFill>
+                      <a:prstDash val="solid"/>
+                      <a:round/>
+                      <a:headEnd type="none" w="med" len="med"/>
+                      <a:tailEnd type="none" w="med" len="med"/>
+                    </a:lnB>
+                    <a:solidFill>
+                      <a:srgbClr val="FFFFFF"/>
+                    </a:solidFill>
+                  </a:tcPr>
+                </a:tc>
+                <a:tc>
+                  <a:txBody>
+                    <a:bodyPr/>
+                    <a:lstStyle/>
+                    <a:p>
+                      <a:pPr algn="r" indent="0" marL="0">
+                        <a:buNone/>
+                      </a:pPr>
+                      <a:r>
+                        <a:rPr lang="en-US" sz="1000" dirty="0">
+                          <a:solidFill>
+                            <a:srgbClr val="1F1D3D"/>
+                          </a:solidFill>
+                          <a:latin typeface="Calibri" pitchFamily="34" charset="0"/>
+                          <a:ea typeface="Calibri" pitchFamily="34" charset="-122"/>
+                          <a:cs typeface="Calibri" pitchFamily="34" charset="-120"/>
+                        </a:rPr>
                         <a:t>110 (61%)</a:t>
                       </a:r>
                       <a:endParaRPr lang="en-US" sz="1000" dirty="0">
@@ -13350,7 +13780,7 @@
       </p:sp>
       <p:pic>
         <p:nvPicPr>
-          <p:cNvPr id="15" name="Image 0" descr="C:\Users\Miller\Desktop\case # 4 genesis\submission_v2\build\assets\logo_ink.png">    </p:cNvPr>
+          <p:cNvPr id="15" name="Image 0" descr="OBRIO">    </p:cNvPr>
           <p:cNvPicPr>
             <a:picLocks noChangeAspect="1"/>
           </p:cNvPicPr>
@@ -15130,7 +15560,7 @@
       </p:sp>
       <p:pic>
         <p:nvPicPr>
-          <p:cNvPr id="20" name="Image 0" descr="C:\Users\Miller\Desktop\case # 4 genesis\submission_v2\build\assets\logo_ink.png">    </p:cNvPr>
+          <p:cNvPr id="20" name="Image 0" descr="OBRIO">    </p:cNvPr>
           <p:cNvPicPr>
             <a:picLocks noChangeAspect="1"/>
           </p:cNvPicPr>
@@ -16756,7 +17186,7 @@
       </p:sp>
       <p:pic>
         <p:nvPicPr>
-          <p:cNvPr id="10" name="Image 0" descr="C:\Users\Miller\Desktop\case # 4 genesis\submission_v2\build\assets\logo_ink.png">    </p:cNvPr>
+          <p:cNvPr id="10" name="Image 0" descr="OBRIO">    </p:cNvPr>
           <p:cNvPicPr>
             <a:picLocks noChangeAspect="1"/>
           </p:cNvPicPr>
@@ -18101,7 +18531,7 @@
       </p:sp>
       <p:pic>
         <p:nvPicPr>
-          <p:cNvPr id="35" name="Image 0" descr="C:\Users\Miller\Desktop\case # 4 genesis\submission_v2\build\assets\logo_ink.png">    </p:cNvPr>
+          <p:cNvPr id="35" name="Image 0" descr="OBRIO">    </p:cNvPr>
           <p:cNvPicPr>
             <a:picLocks noChangeAspect="1"/>
           </p:cNvPicPr>
@@ -19710,7 +20140,7 @@
       </p:sp>
       <p:pic>
         <p:nvPicPr>
-          <p:cNvPr id="25" name="Image 0" descr="C:\Users\Miller\Desktop\case # 4 genesis\submission_v2\build\assets\logo_ink.png">    </p:cNvPr>
+          <p:cNvPr id="25" name="Image 0" descr="OBRIO">    </p:cNvPr>
           <p:cNvPicPr>
             <a:picLocks noChangeAspect="1"/>
           </p:cNvPicPr>
@@ -20652,7 +21082,7 @@
       </p:sp>
       <p:pic>
         <p:nvPicPr>
-          <p:cNvPr id="25" name="Image 0" descr="C:\Users\Miller\Desktop\case # 4 genesis\submission_v2\build\assets\logo_ink.png">    </p:cNvPr>
+          <p:cNvPr id="25" name="Image 0" descr="OBRIO">    </p:cNvPr>
           <p:cNvPicPr>
             <a:picLocks noChangeAspect="1"/>
           </p:cNvPicPr>
@@ -20968,7 +21398,7 @@
                 <a:ea typeface="Calibri" pitchFamily="34" charset="-122"/>
                 <a:cs typeface="Calibri" pitchFamily="34" charset="-120"/>
               </a:rPr>
-              <a:t>38%</a:t>
+              <a:t>47%</a:t>
             </a:r>
             <a:endParaRPr lang="en-US" sz="3400" dirty="0"/>
           </a:p>
@@ -21451,7 +21881,7 @@
       </p:sp>
       <p:pic>
         <p:nvPicPr>
-          <p:cNvPr id="21" name="Image 0" descr="C:\Users\Miller\Desktop\case # 4 genesis\submission_v2\build\assets\logo_ink.png">    </p:cNvPr>
+          <p:cNvPr id="21" name="Image 0" descr="OBRIO">    </p:cNvPr>
           <p:cNvPicPr>
             <a:picLocks noChangeAspect="1"/>
           </p:cNvPicPr>
@@ -21506,7 +21936,7 @@
                 <a:ea typeface="Calibri" pitchFamily="34" charset="-122"/>
                 <a:cs typeface="Calibri" pitchFamily="34" charset="-120"/>
               </a:rPr>
-              <a:t>Джерело: 02_analysis_notebook.ipynb, розділи 2.4 і 5</a:t>
+              <a:t>Джерело: файл аналізу (ноутбук), розділи 2.4 і 5</a:t>
             </a:r>
             <a:endParaRPr lang="en-US" sz="900" dirty="0"/>
           </a:p>
@@ -22530,7 +22960,7 @@
       </p:sp>
       <p:pic>
         <p:nvPicPr>
-          <p:cNvPr id="28" name="Image 0" descr="C:\Users\Miller\Desktop\case # 4 genesis\submission_v2\build\assets\logo_brand.png">    </p:cNvPr>
+          <p:cNvPr id="28" name="Image 0" descr="OBRIO">    </p:cNvPr>
           <p:cNvPicPr>
             <a:picLocks noChangeAspect="1"/>
           </p:cNvPicPr>
@@ -23452,7 +23882,7 @@
       </p:sp>
       <p:pic>
         <p:nvPicPr>
-          <p:cNvPr id="27" name="Image 0" descr="C:\Users\Miller\Desktop\case # 4 genesis\submission_v2\build\assets\logo_ink.png">    </p:cNvPr>
+          <p:cNvPr id="27" name="Image 0" descr="OBRIO">    </p:cNvPr>
           <p:cNvPicPr>
             <a:picLocks noChangeAspect="1"/>
           </p:cNvPicPr>
@@ -23768,7 +24198,7 @@
                 <a:ea typeface="Calibri" pitchFamily="34" charset="-122"/>
                 <a:cs typeface="Calibri" pitchFamily="34" charset="-120"/>
               </a:rPr>
-              <a:t>Ця презентація</a:t>
+              <a:t>1_Презентація.pptx</a:t>
             </a:r>
             <a:endParaRPr lang="en-US" sz="1200" dirty="0"/>
           </a:p>
@@ -23807,7 +24237,7 @@
                 <a:ea typeface="Calibri" pitchFamily="34" charset="-122"/>
                 <a:cs typeface="Calibri" pitchFamily="34" charset="-120"/>
               </a:rPr>
-              <a:t>Усі висновки, правила, обмеження й план перевірки — безпосередньо на слайдах.</a:t>
+              <a:t>Цей файл. Усі висновки, правила, обмеження й план перевірки — безпосередньо на слайдах.</a:t>
             </a:r>
             <a:endParaRPr lang="en-US" sz="1000" dirty="0"/>
           </a:p>
@@ -23919,7 +24349,7 @@
                 <a:ea typeface="Calibri" pitchFamily="34" charset="-122"/>
                 <a:cs typeface="Calibri" pitchFamily="34" charset="-120"/>
               </a:rPr>
-              <a:t>02_analysis_report.html</a:t>
+              <a:t>2_Аналіз_у_браузері.html</a:t>
             </a:r>
             <a:endParaRPr lang="en-US" sz="1200" dirty="0"/>
           </a:p>
@@ -24070,7 +24500,7 @@
                 <a:ea typeface="Calibri" pitchFamily="34" charset="-122"/>
                 <a:cs typeface="Calibri" pitchFamily="34" charset="-120"/>
               </a:rPr>
-              <a:t>02_analysis_notebook.ipynb</a:t>
+              <a:t>3_Аналіз_ноутбук.ipynb</a:t>
             </a:r>
             <a:endParaRPr lang="en-US" sz="1200" dirty="0"/>
           </a:p>
@@ -24955,7 +25385,7 @@
       </p:sp>
       <p:pic>
         <p:nvPicPr>
-          <p:cNvPr id="40" name="Image 0" descr="C:\Users\Miller\Desktop\case # 4 genesis\submission_v2\build\assets\logo_ink.png">    </p:cNvPr>
+          <p:cNvPr id="40" name="Image 0" descr="OBRIO">    </p:cNvPr>
           <p:cNvPicPr>
             <a:picLocks noChangeAspect="1"/>
           </p:cNvPicPr>
@@ -25824,7 +26254,7 @@
       </p:sp>
       <p:pic>
         <p:nvPicPr>
-          <p:cNvPr id="24" name="Image 0" descr="C:\Users\Miller\Desktop\case # 4 genesis\submission_v2\build\assets\logo_ink.png">    </p:cNvPr>
+          <p:cNvPr id="24" name="Image 0" descr="OBRIO">    </p:cNvPr>
           <p:cNvPicPr>
             <a:picLocks noChangeAspect="1"/>
           </p:cNvPicPr>
@@ -27363,7 +27793,7 @@
       </p:sp>
       <p:pic>
         <p:nvPicPr>
-          <p:cNvPr id="43" name="Image 0" descr="C:\Users\Miller\Desktop\case # 4 genesis\submission_v2\build\assets\logo_ink.png">    </p:cNvPr>
+          <p:cNvPr id="43" name="Image 0" descr="OBRIO">    </p:cNvPr>
           <p:cNvPicPr>
             <a:picLocks noChangeAspect="1"/>
           </p:cNvPicPr>
@@ -28664,7 +29094,7 @@
       </p:sp>
       <p:pic>
         <p:nvPicPr>
-          <p:cNvPr id="35" name="Image 0" descr="C:\Users\Miller\Desktop\case # 4 genesis\submission_v2\build\assets\logo_ink.png">    </p:cNvPr>
+          <p:cNvPr id="35" name="Image 0" descr="OBRIO">    </p:cNvPr>
           <p:cNvPicPr>
             <a:picLocks noChangeAspect="1"/>
           </p:cNvPicPr>
@@ -29665,7 +30095,7 @@
       </p:sp>
       <p:pic>
         <p:nvPicPr>
-          <p:cNvPr id="27" name="Image 0" descr="C:\Users\Miller\Desktop\case # 4 genesis\submission_v2\build\assets\logo_ink.png">    </p:cNvPr>
+          <p:cNvPr id="27" name="Image 0" descr="OBRIO">    </p:cNvPr>
           <p:cNvPicPr>
             <a:picLocks noChangeAspect="1"/>
           </p:cNvPicPr>
@@ -32026,7 +32456,7 @@
       </p:sp>
       <p:pic>
         <p:nvPicPr>
-          <p:cNvPr id="25" name="Image 0" descr="C:\Users\Miller\Desktop\case # 4 genesis\submission_v2\build\assets\logo_ink.png">    </p:cNvPr>
+          <p:cNvPr id="25" name="Image 0" descr="OBRIO">    </p:cNvPr>
           <p:cNvPicPr>
             <a:picLocks noChangeAspect="1"/>
           </p:cNvPicPr>
@@ -33150,7 +33580,7 @@
       </p:sp>
       <p:pic>
         <p:nvPicPr>
-          <p:cNvPr id="31" name="Image 0" descr="C:\Users\Miller\Desktop\case # 4 genesis\submission_v2\build\assets\logo_ink.png">    </p:cNvPr>
+          <p:cNvPr id="31" name="Image 0" descr="OBRIO">    </p:cNvPr>
           <p:cNvPicPr>
             <a:picLocks noChangeAspect="1"/>
           </p:cNvPicPr>
@@ -35383,7 +35813,7 @@
       </p:sp>
       <p:pic>
         <p:nvPicPr>
-          <p:cNvPr id="16" name="Image 0" descr="C:\Users\Miller\Desktop\case # 4 genesis\submission_v2\build\assets\logo_ink.png">    </p:cNvPr>
+          <p:cNvPr id="16" name="Image 0" descr="OBRIO">    </p:cNvPr>
           <p:cNvPicPr>
             <a:picLocks noChangeAspect="1"/>
           </p:cNvPicPr>
